--- a/Schools_ML_Track/camp_2026/slides/ML/ML01.pptx
+++ b/Schools_ML_Track/camp_2026/slides/ML/ML01.pptx
@@ -129,7 +129,7 @@
   <p:extLst>
     <p:ext uri="{521415D9-36F7-43E2-AB2F-B90AF26B5E84}">
       <p14:sectionLst xmlns:p14="http://schemas.microsoft.com/office/powerpoint/2010/main">
-        <p14:section name="Opening" id="{ee20cbcc-2419-e3d5-483d-e39e211b657a}">
+        <p14:section name="Opening" id="{280d6cf1-a6ed-487e-e425-1fadaf7993d2}">
           <p14:sldIdLst>
             <p14:sldId id="256"/>
             <p14:sldId id="257"/>
@@ -141,7 +141,7 @@
             <p14:sldId id="263"/>
           </p14:sldIdLst>
         </p14:section>
-        <p14:section name="Block A" id="{4ad1bdf4-821c-0e3d-35be-2a88fb9b4ebe}">
+        <p14:section name="Block A" id="{0bf9a322-c45f-1d33-e8ae-6d2dece14bc6}">
           <p14:sldIdLst>
             <p14:sldId id="264"/>
             <p14:sldId id="265"/>
@@ -151,15 +151,15 @@
             <p14:sldId id="270"/>
           </p14:sldIdLst>
         </p14:section>
-        <p14:section name="Break" id="{cfea7d9a-ad4c-1d20-2676-ce8aa9234228}">
+        <p14:section name="Break" id="{a7e71b05-5e26-6529-435f-648febcb2597}">
           <p14:sldIdLst>
             <p14:sldId id="268"/>
           </p14:sldIdLst>
         </p14:section>
-        <p14:section name="Block A" id="{bca6c4bc-6ee4-5cd7-9a2f-07f8789861d3}">
+        <p14:section name="Block A" id="{b6e2d4d0-15cf-3027-1f2e-71ad9ffbd104}">
           <p14:sldIdLst/>
         </p14:section>
-        <p14:section name="Block B" id="{7275a8b9-d26f-a351-fcd9-1e0cbe7e91d9}">
+        <p14:section name="Block B" id="{487b7d67-a418-1bb6-11dc-7b1d66a53d1a}">
           <p14:sldIdLst>
             <p14:sldId id="271"/>
             <p14:sldId id="272"/>
@@ -168,7 +168,7 @@
             <p14:sldId id="275"/>
           </p14:sldIdLst>
         </p14:section>
-        <p14:section name="Make and close" id="{9c12d6c9-446c-ac1f-7431-34b0f0433eaa}">
+        <p14:section name="Make and close" id="{7fdecb05-2033-b6ea-a71a-5b5abd828298}">
           <p14:sldIdLst>
             <p14:sldId id="276"/>
             <p14:sldId id="277"/>

--- a/Schools_ML_Track/camp_2026/slides/ML/ML01.pptx
+++ b/Schools_ML_Track/camp_2026/slides/ML/ML01.pptx
@@ -28,9 +28,10 @@
     <p:sldId id="276" r:id="rId22"/>
     <p:sldId id="277" r:id="rId23"/>
     <p:sldId id="278" r:id="rId24"/>
+    <p:sldId id="279" r:id="rId25"/>
   </p:sldIdLst>
   <p:notesMasterIdLst>
-    <p:notesMasterId r:id="rId25"/>
+    <p:notesMasterId r:id="rId26"/>
   </p:notesMasterIdLst>
   <p:sldSz cx="12192000" cy="6858000"/>
   <p:notesSz cx="6858000" cy="12192000"/>
@@ -129,7 +130,7 @@
   <p:extLst>
     <p:ext uri="{521415D9-36F7-43E2-AB2F-B90AF26B5E84}">
       <p14:sectionLst xmlns:p14="http://schemas.microsoft.com/office/powerpoint/2010/main">
-        <p14:section name="Opening" id="{280d6cf1-a6ed-487e-e425-1fadaf7993d2}">
+        <p14:section name="Opening" id="{48b9ba5a-839a-9bea-4701-b458d7bd66fa}">
           <p14:sldIdLst>
             <p14:sldId id="256"/>
             <p14:sldId id="257"/>
@@ -141,7 +142,7 @@
             <p14:sldId id="263"/>
           </p14:sldIdLst>
         </p14:section>
-        <p14:section name="Block A" id="{0bf9a322-c45f-1d33-e8ae-6d2dece14bc6}">
+        <p14:section name="Block A" id="{84a1accc-6fab-7ddd-00b0-22e7b838ae0a}">
           <p14:sldIdLst>
             <p14:sldId id="264"/>
             <p14:sldId id="265"/>
@@ -151,15 +152,15 @@
             <p14:sldId id="270"/>
           </p14:sldIdLst>
         </p14:section>
-        <p14:section name="Break" id="{a7e71b05-5e26-6529-435f-648febcb2597}">
+        <p14:section name="Break" id="{8c3ebb2b-29f0-3442-03f3-56977ed60702}">
           <p14:sldIdLst>
             <p14:sldId id="268"/>
           </p14:sldIdLst>
         </p14:section>
-        <p14:section name="Block A" id="{b6e2d4d0-15cf-3027-1f2e-71ad9ffbd104}">
+        <p14:section name="Block A" id="{7399f45a-bb21-befc-a479-6fd18eeb46f3}">
           <p14:sldIdLst/>
         </p14:section>
-        <p14:section name="Block B" id="{487b7d67-a418-1bb6-11dc-7b1d66a53d1a}">
+        <p14:section name="Block B" id="{507689de-cb81-3446-6b4c-cb783e5153a6}">
           <p14:sldIdLst>
             <p14:sldId id="271"/>
             <p14:sldId id="272"/>
@@ -168,11 +169,12 @@
             <p14:sldId id="275"/>
           </p14:sldIdLst>
         </p14:section>
-        <p14:section name="Make and close" id="{7fdecb05-2033-b6ea-a71a-5b5abd828298}">
+        <p14:section name="Make and close" id="{09b8ae84-1b86-2dfc-8a2b-07e16dcfe9b4}">
           <p14:sldIdLst>
             <p14:sldId id="276"/>
             <p14:sldId id="277"/>
             <p14:sldId id="278"/>
+            <p14:sldId id="279"/>
           </p14:sldIdLst>
         </p14:section>
       </p14:sectionLst>
@@ -1747,7 +1749,8 @@
             <a:r>
               <a:rPr lang="en-US" dirty="0"/>
               <a:t>Now you do the real work yourself. Start with the first step. If you get stuck for a few minutes, read your error message, check the error card, and then ask me.
-Save it as ML01. I will come round to each of you and ask what you changed and how you checked it.</a:t>
+Save it as ML01. I will come round to each of you and ask what you changed and how you checked it.
+The rest of the brief is on the next slide.</a:t>
             </a:r>
             <a:endParaRPr lang="en-US" dirty="0"/>
           </a:p>
@@ -1835,10 +1838,7 @@
           <a:p>
             <a:r>
               <a:rPr lang="en-US" dirty="0"/>
-              <a:t>Two things are likely to go wrong today. It helps to know them before they happen.
-This is the first one. You will see: SyntaxError or invalid character. It means this: A quotation mark is curly, usually from copying out of a document. To fix it, retype the quote marks with the keyboard so they are straight.
-The next one. You will see: ModuleNotFoundError: No module named 'sklearn'. It means this: this laptop is not using the prepared camp environment. To fix it, tell the instructor. Do not install anything yourself.
-If you meet one of these, fix it and carry on. It happens to everyone.</a:t>
+              <a:t>Here is the rest of the brief. Take your time, and save your work as you go, because a saved file is the only thing I can mark.</a:t>
             </a:r>
             <a:endParaRPr lang="en-US" dirty="0"/>
           </a:p>
@@ -1926,9 +1926,10 @@
           <a:p>
             <a:r>
               <a:rPr lang="en-US" dirty="0"/>
-              <a:t>Before we finish, go back to the question we began with: Can a computer guess a rent after seeing 120 homes?
-Copy this sentence into your notebook and make it yours. A prediction is a guess for something not yet seen; the rent model guesses a number from 120 examples.
-Then save your notebook, close it and open it again to check it saved.</a:t>
+              <a:t>Two things are likely to go wrong today. It helps to know them before they happen.
+This is the first one. You will see: SyntaxError or invalid character. It means this: A quotation mark is curly, usually from copying out of a document. To fix it, retype the quote marks with the keyboard so they are straight.
+The next one. You will see: ModuleNotFoundError: No module named 'sklearn'. It means this: this laptop is not using the prepared camp environment. To fix it, tell the instructor. Do not install anything yourself.
+If you meet one of these, fix it and carry on. It happens to everyone.</a:t>
             </a:r>
             <a:endParaRPr lang="en-US" dirty="0"/>
           </a:p>
@@ -1952,6 +1953,96 @@
             <a:fld id="{F7021451-1387-4CA6-816F-3879F97B5CBC}" type="slidenum">
               <a:rPr lang="en-US"/>
               <a:t>23</a:t>
+            </a:fld>
+            <a:endParaRPr lang="en-US"/>
+          </a:p>
+        </p:txBody>
+      </p:sp>
+    </p:spTree>
+    <p:extLst>
+      <p:ext uri="{BB962C8B-B14F-4D97-AF65-F5344CB8AC3E}">
+        <p14:creationId xmlns:p14="http://schemas.microsoft.com/office/powerpoint/2010/main" val="1024086991"/>
+      </p:ext>
+    </p:extLst>
+  </p:cSld>
+  <p:clrMapOvr>
+    <a:masterClrMapping/>
+  </p:clrMapOvr>
+</p:notes>
+</file>
+
+<file path=ppt/notesSlides/notesSlide24.xml><?xml version="1.0" encoding="utf-8"?>
+<p:notes xmlns:a="http://schemas.openxmlformats.org/drawingml/2006/main" xmlns:r="http://schemas.openxmlformats.org/officeDocument/2006/relationships" xmlns:p="http://schemas.openxmlformats.org/presentationml/2006/main">
+  <p:cSld>
+    <p:spTree>
+      <p:nvGrpSpPr>
+        <p:cNvPr id="1" name=""/>
+        <p:cNvGrpSpPr/>
+        <p:nvPr/>
+      </p:nvGrpSpPr>
+      <p:grpSpPr>
+        <a:xfrm>
+          <a:off x="0" y="0"/>
+          <a:ext cx="0" cy="0"/>
+          <a:chOff x="0" y="0"/>
+          <a:chExt cx="0" cy="0"/>
+        </a:xfrm>
+      </p:grpSpPr>
+      <p:sp>
+        <p:nvSpPr>
+          <p:cNvPr id="2" name="Slide Image Placeholder 1"/>
+          <p:cNvSpPr>
+            <a:spLocks noGrp="1" noRot="1" noChangeAspect="1"/>
+          </p:cNvSpPr>
+          <p:nvPr>
+            <p:ph type="sldImg"/>
+          </p:nvPr>
+        </p:nvSpPr>
+        <p:spPr/>
+      </p:sp>
+      <p:sp>
+        <p:nvSpPr>
+          <p:cNvPr id="3" name="Notes Placeholder 2"/>
+          <p:cNvSpPr>
+            <a:spLocks noGrp="1"/>
+          </p:cNvSpPr>
+          <p:nvPr>
+            <p:ph type="body" idx="1"/>
+          </p:nvPr>
+        </p:nvSpPr>
+        <p:spPr/>
+        <p:txBody>
+          <a:bodyPr/>
+          <a:lstStyle/>
+          <a:p>
+            <a:r>
+              <a:rPr lang="en-US" dirty="0"/>
+              <a:t>Before we finish, go back to the question we began with: Can a computer guess a rent after seeing 120 homes?
+Copy this sentence into your notebook and make it yours. A prediction is a guess for something not yet seen; the rent model guesses a number from 120 examples.
+Then save your notebook, close it and open it again to check it saved.</a:t>
+            </a:r>
+            <a:endParaRPr lang="en-US" dirty="0"/>
+          </a:p>
+        </p:txBody>
+      </p:sp>
+      <p:sp>
+        <p:nvSpPr>
+          <p:cNvPr id="4" name="Slide Number Placeholder 3"/>
+          <p:cNvSpPr>
+            <a:spLocks noGrp="1"/>
+          </p:cNvSpPr>
+          <p:nvPr>
+            <p:ph type="sldNum" sz="quarter" idx="10"/>
+          </p:nvPr>
+        </p:nvSpPr>
+        <p:spPr/>
+        <p:txBody>
+          <a:bodyPr/>
+          <a:lstStyle/>
+          <a:p>
+            <a:fld id="{F7021451-1387-4CA6-816F-3879F97B5CBC}" type="slidenum">
+              <a:rPr lang="en-US"/>
+              <a:t>24</a:t>
             </a:fld>
             <a:endParaRPr lang="en-US"/>
           </a:p>
@@ -3290,7 +3381,24 @@
                 <a:ea typeface="Lato" pitchFamily="34" charset="-122"/>
                 <a:cs typeface="Lato" pitchFamily="34" charset="-120"/>
               </a:rPr>
-              <a:t>Your first instruction and your first prediction</a:t>
+              <a:t>Your first instruction</a:t>
+            </a:r>
+            <a:endParaRPr lang="en-US" sz="5600" dirty="0"/>
+          </a:p>
+          <a:p>
+            <a:pPr algn="l" indent="0" marL="0">
+              <a:buNone/>
+            </a:pPr>
+            <a:r>
+              <a:rPr lang="en-US" sz="5600" b="1" dirty="0">
+                <a:solidFill>
+                  <a:srgbClr val="FFFFFF"/>
+                </a:solidFill>
+                <a:latin typeface="Lato" pitchFamily="34" charset="0"/>
+                <a:ea typeface="Lato" pitchFamily="34" charset="-122"/>
+                <a:cs typeface="Lato" pitchFamily="34" charset="-120"/>
+              </a:rPr>
+              <a:t>and your first prediction</a:t>
             </a:r>
             <a:endParaRPr lang="en-US" sz="5600" dirty="0"/>
           </a:p>
@@ -5041,11 +5149,11 @@
         <p:spPr>
           <a:xfrm>
             <a:off x="640080" y="1645920"/>
-            <a:ext cx="10881360" cy="3344672"/>
+            <a:ext cx="10881360" cy="2221992"/>
           </a:xfrm>
           <a:prstGeom prst="roundRect">
             <a:avLst>
-              <a:gd name="adj" fmla="val 2187"/>
+              <a:gd name="adj" fmla="val 3292"/>
             </a:avLst>
           </a:prstGeom>
           <a:solidFill>
@@ -5063,7 +5171,7 @@
         <p:spPr>
           <a:xfrm>
             <a:off x="841248" y="1847088"/>
-            <a:ext cx="10479024" cy="2942336"/>
+            <a:ext cx="10479024" cy="1819656"/>
           </a:xfrm>
           <a:prstGeom prst="rect">
             <a:avLst/>
@@ -5077,12 +5185,12 @@
           <a:p>
             <a:pPr algn="l" indent="0" marL="0">
               <a:lnSpc>
-                <a:spcPts val="2860"/>
-              </a:lnSpc>
-              <a:buNone/>
-            </a:pPr>
-            <a:r>
-              <a:rPr lang="en-US" sz="2200" b="1" dirty="0">
+                <a:spcPts val="2340"/>
+              </a:lnSpc>
+              <a:buNone/>
+            </a:pPr>
+            <a:r>
+              <a:rPr lang="en-US" sz="1800" b="1" dirty="0">
                 <a:solidFill>
                   <a:srgbClr val="FFFFFF"/>
                 </a:solidFill>
@@ -5094,12 +5202,12 @@
             </a:r>
             <a:pPr algn="l" indent="0" marL="0">
               <a:lnSpc>
-                <a:spcPts val="2860"/>
-              </a:lnSpc>
-              <a:buNone/>
-            </a:pPr>
-            <a:r>
-              <a:rPr lang="en-US" sz="2200" dirty="0">
+                <a:spcPts val="2340"/>
+              </a:lnSpc>
+              <a:buNone/>
+            </a:pPr>
+            <a:r>
+              <a:rPr lang="en-US" sz="1800" dirty="0">
                 <a:solidFill>
                   <a:srgbClr val="FFFFFF"/>
                 </a:solidFill>
@@ -5111,12 +5219,12 @@
             </a:r>
             <a:pPr algn="l" indent="0" marL="0">
               <a:lnSpc>
-                <a:spcPts val="2860"/>
-              </a:lnSpc>
-              <a:buNone/>
-            </a:pPr>
-            <a:r>
-              <a:rPr lang="en-US" sz="2200" b="1" dirty="0">
+                <a:spcPts val="2340"/>
+              </a:lnSpc>
+              <a:buNone/>
+            </a:pPr>
+            <a:r>
+              <a:rPr lang="en-US" sz="1800" b="1" dirty="0">
                 <a:solidFill>
                   <a:srgbClr val="FFFFFF"/>
                 </a:solidFill>
@@ -5128,12 +5236,12 @@
             </a:r>
             <a:pPr algn="l" indent="0" marL="0">
               <a:lnSpc>
-                <a:spcPts val="2860"/>
-              </a:lnSpc>
-              <a:buNone/>
-            </a:pPr>
-            <a:r>
-              <a:rPr lang="en-US" sz="2200" dirty="0">
+                <a:spcPts val="2340"/>
+              </a:lnSpc>
+              <a:buNone/>
+            </a:pPr>
+            <a:r>
+              <a:rPr lang="en-US" sz="1800" dirty="0">
                 <a:solidFill>
                   <a:srgbClr val="FFFFFF"/>
                 </a:solidFill>
@@ -5143,17 +5251,17 @@
               </a:rPr>
               <a:t> pd</a:t>
             </a:r>
-            <a:endParaRPr lang="en-US" sz="2200" dirty="0"/>
-          </a:p>
-          <a:p>
-            <a:pPr algn="l" indent="0" marL="0">
-              <a:lnSpc>
-                <a:spcPts val="2860"/>
-              </a:lnSpc>
-              <a:buNone/>
-            </a:pPr>
-            <a:r>
-              <a:rPr lang="en-US" sz="2200" b="1" dirty="0">
+            <a:endParaRPr lang="en-US" sz="1800" dirty="0"/>
+          </a:p>
+          <a:p>
+            <a:pPr algn="l" indent="0" marL="0">
+              <a:lnSpc>
+                <a:spcPts val="2340"/>
+              </a:lnSpc>
+              <a:buNone/>
+            </a:pPr>
+            <a:r>
+              <a:rPr lang="en-US" sz="1800" b="1" dirty="0">
                 <a:solidFill>
                   <a:srgbClr val="FFFFFF"/>
                 </a:solidFill>
@@ -5165,12 +5273,12 @@
             </a:r>
             <a:pPr algn="l" indent="0" marL="0">
               <a:lnSpc>
-                <a:spcPts val="2860"/>
-              </a:lnSpc>
-              <a:buNone/>
-            </a:pPr>
-            <a:r>
-              <a:rPr lang="en-US" sz="2200" dirty="0">
+                <a:spcPts val="2340"/>
+              </a:lnSpc>
+              <a:buNone/>
+            </a:pPr>
+            <a:r>
+              <a:rPr lang="en-US" sz="1800" dirty="0">
                 <a:solidFill>
                   <a:srgbClr val="FFFFFF"/>
                 </a:solidFill>
@@ -5182,12 +5290,12 @@
             </a:r>
             <a:pPr algn="l" indent="0" marL="0">
               <a:lnSpc>
-                <a:spcPts val="2860"/>
-              </a:lnSpc>
-              <a:buNone/>
-            </a:pPr>
-            <a:r>
-              <a:rPr lang="en-US" sz="2200" b="1" dirty="0">
+                <a:spcPts val="2340"/>
+              </a:lnSpc>
+              <a:buNone/>
+            </a:pPr>
+            <a:r>
+              <a:rPr lang="en-US" sz="1800" b="1" dirty="0">
                 <a:solidFill>
                   <a:srgbClr val="FFFFFF"/>
                 </a:solidFill>
@@ -5199,12 +5307,12 @@
             </a:r>
             <a:pPr algn="l" indent="0" marL="0">
               <a:lnSpc>
-                <a:spcPts val="2860"/>
-              </a:lnSpc>
-              <a:buNone/>
-            </a:pPr>
-            <a:r>
-              <a:rPr lang="en-US" sz="2200" dirty="0">
+                <a:spcPts val="2340"/>
+              </a:lnSpc>
+              <a:buNone/>
+            </a:pPr>
+            <a:r>
+              <a:rPr lang="en-US" sz="1800" dirty="0">
                 <a:solidFill>
                   <a:srgbClr val="FFFFFF"/>
                 </a:solidFill>
@@ -5214,17 +5322,17 @@
               </a:rPr>
               <a:t> LinearRegression</a:t>
             </a:r>
-            <a:endParaRPr lang="en-US" sz="2200" dirty="0"/>
-          </a:p>
-          <a:p>
-            <a:pPr algn="l" indent="0" marL="0">
-              <a:lnSpc>
-                <a:spcPts val="2860"/>
-              </a:lnSpc>
-              <a:buNone/>
-            </a:pPr>
-            <a:r>
-              <a:rPr lang="en-US" sz="2200" dirty="0">
+            <a:endParaRPr lang="en-US" sz="1800" dirty="0"/>
+          </a:p>
+          <a:p>
+            <a:pPr algn="l" indent="0" marL="0">
+              <a:lnSpc>
+                <a:spcPts val="2340"/>
+              </a:lnSpc>
+              <a:buNone/>
+            </a:pPr>
+            <a:r>
+              <a:rPr lang="en-US" sz="1800" dirty="0">
                 <a:solidFill>
                   <a:srgbClr val="FFFFFF"/>
                 </a:solidFill>
@@ -5236,12 +5344,12 @@
             </a:r>
             <a:pPr algn="l" indent="0" marL="0">
               <a:lnSpc>
-                <a:spcPts val="2860"/>
-              </a:lnSpc>
-              <a:buNone/>
-            </a:pPr>
-            <a:r>
-              <a:rPr lang="en-US" sz="2200" dirty="0">
+                <a:spcPts val="2340"/>
+              </a:lnSpc>
+              <a:buNone/>
+            </a:pPr>
+            <a:r>
+              <a:rPr lang="en-US" sz="1800" dirty="0">
                 <a:solidFill>
                   <a:srgbClr val="E0BE36"/>
                 </a:solidFill>
@@ -5253,12 +5361,12 @@
             </a:r>
             <a:pPr algn="l" indent="0" marL="0">
               <a:lnSpc>
-                <a:spcPts val="2860"/>
-              </a:lnSpc>
-              <a:buNone/>
-            </a:pPr>
-            <a:r>
-              <a:rPr lang="en-US" sz="2200" dirty="0">
+                <a:spcPts val="2340"/>
+              </a:lnSpc>
+              <a:buNone/>
+            </a:pPr>
+            <a:r>
+              <a:rPr lang="en-US" sz="1800" dirty="0">
                 <a:solidFill>
                   <a:srgbClr val="FFFFFF"/>
                 </a:solidFill>
@@ -5268,17 +5376,17 @@
               </a:rPr>
               <a:t>)</a:t>
             </a:r>
-            <a:endParaRPr lang="en-US" sz="2200" dirty="0"/>
-          </a:p>
-          <a:p>
-            <a:pPr algn="l" indent="0" marL="0">
-              <a:lnSpc>
-                <a:spcPts val="2860"/>
-              </a:lnSpc>
-              <a:buNone/>
-            </a:pPr>
-            <a:r>
-              <a:rPr lang="en-US" sz="2200" dirty="0">
+            <a:endParaRPr lang="en-US" sz="1800" dirty="0"/>
+          </a:p>
+          <a:p>
+            <a:pPr algn="l" indent="0" marL="0">
+              <a:lnSpc>
+                <a:spcPts val="2340"/>
+              </a:lnSpc>
+              <a:buNone/>
+            </a:pPr>
+            <a:r>
+              <a:rPr lang="en-US" sz="1800" dirty="0">
                 <a:solidFill>
                   <a:srgbClr val="FFFFFF"/>
                 </a:solidFill>
@@ -5286,87 +5394,87 @@
                 <a:ea typeface="Courier New" pitchFamily="34" charset="-122"/>
                 <a:cs typeface="Courier New" pitchFamily="34" charset="-120"/>
               </a:rPr>
-              <a:t>model = LinearRegression().fit(</a:t>
-            </a:r>
-            <a:endParaRPr lang="en-US" sz="2200" dirty="0"/>
-          </a:p>
-          <a:p>
-            <a:pPr algn="l" indent="0" marL="0">
-              <a:lnSpc>
-                <a:spcPts val="2860"/>
-              </a:lnSpc>
-              <a:buNone/>
-            </a:pPr>
-            <a:r>
-              <a:rPr lang="en-US" sz="2200" dirty="0">
-                <a:solidFill>
-                  <a:srgbClr val="FFFFFF"/>
+              <a:t>model = LinearRegression().fit(homes[[</a:t>
+            </a:r>
+            <a:pPr algn="l" indent="0" marL="0">
+              <a:lnSpc>
+                <a:spcPts val="2340"/>
+              </a:lnSpc>
+              <a:buNone/>
+            </a:pPr>
+            <a:r>
+              <a:rPr lang="en-US" sz="1800" dirty="0">
+                <a:solidFill>
+                  <a:srgbClr val="E0BE36"/>
                 </a:solidFill>
                 <a:latin typeface="Courier New" pitchFamily="34" charset="0"/>
                 <a:ea typeface="Courier New" pitchFamily="34" charset="-122"/>
                 <a:cs typeface="Courier New" pitchFamily="34" charset="-120"/>
               </a:rPr>
-              <a:t>    homes[[</a:t>
-            </a:r>
-            <a:pPr algn="l" indent="0" marL="0">
-              <a:lnSpc>
-                <a:spcPts val="2860"/>
-              </a:lnSpc>
-              <a:buNone/>
-            </a:pPr>
-            <a:r>
-              <a:rPr lang="en-US" sz="2200" dirty="0">
-                <a:solidFill>
-                  <a:srgbClr val="E0BE36"/>
+              <a:t>"area_m2"</a:t>
+            </a:r>
+            <a:pPr algn="l" indent="0" marL="0">
+              <a:lnSpc>
+                <a:spcPts val="2340"/>
+              </a:lnSpc>
+              <a:buNone/>
+            </a:pPr>
+            <a:r>
+              <a:rPr lang="en-US" sz="1800" dirty="0">
+                <a:solidFill>
+                  <a:srgbClr val="FFFFFF"/>
                 </a:solidFill>
                 <a:latin typeface="Courier New" pitchFamily="34" charset="0"/>
                 <a:ea typeface="Courier New" pitchFamily="34" charset="-122"/>
                 <a:cs typeface="Courier New" pitchFamily="34" charset="-120"/>
               </a:rPr>
-              <a:t>"area_m2"</a:t>
-            </a:r>
-            <a:pPr algn="l" indent="0" marL="0">
-              <a:lnSpc>
-                <a:spcPts val="2860"/>
-              </a:lnSpc>
-              <a:buNone/>
-            </a:pPr>
-            <a:r>
-              <a:rPr lang="en-US" sz="2200" dirty="0">
-                <a:solidFill>
-                  <a:srgbClr val="FFFFFF"/>
+              <a:t>]], homes[</a:t>
+            </a:r>
+            <a:pPr algn="l" indent="0" marL="0">
+              <a:lnSpc>
+                <a:spcPts val="2340"/>
+              </a:lnSpc>
+              <a:buNone/>
+            </a:pPr>
+            <a:r>
+              <a:rPr lang="en-US" sz="1800" dirty="0">
+                <a:solidFill>
+                  <a:srgbClr val="E0BE36"/>
                 </a:solidFill>
                 <a:latin typeface="Courier New" pitchFamily="34" charset="0"/>
                 <a:ea typeface="Courier New" pitchFamily="34" charset="-122"/>
                 <a:cs typeface="Courier New" pitchFamily="34" charset="-120"/>
               </a:rPr>
-              <a:t>]], homes[</a:t>
-            </a:r>
-            <a:pPr algn="l" indent="0" marL="0">
-              <a:lnSpc>
-                <a:spcPts val="2860"/>
-              </a:lnSpc>
-              <a:buNone/>
-            </a:pPr>
-            <a:r>
-              <a:rPr lang="en-US" sz="2200" dirty="0">
-                <a:solidFill>
-                  <a:srgbClr val="E0BE36"/>
+              <a:t>"rent_ugx"</a:t>
+            </a:r>
+            <a:pPr algn="l" indent="0" marL="0">
+              <a:lnSpc>
+                <a:spcPts val="2340"/>
+              </a:lnSpc>
+              <a:buNone/>
+            </a:pPr>
+            <a:r>
+              <a:rPr lang="en-US" sz="1800" dirty="0">
+                <a:solidFill>
+                  <a:srgbClr val="FFFFFF"/>
                 </a:solidFill>
                 <a:latin typeface="Courier New" pitchFamily="34" charset="0"/>
                 <a:ea typeface="Courier New" pitchFamily="34" charset="-122"/>
                 <a:cs typeface="Courier New" pitchFamily="34" charset="-120"/>
               </a:rPr>
-              <a:t>"rent_ugx"</a:t>
-            </a:r>
-            <a:pPr algn="l" indent="0" marL="0">
-              <a:lnSpc>
-                <a:spcPts val="2860"/>
-              </a:lnSpc>
-              <a:buNone/>
-            </a:pPr>
-            <a:r>
-              <a:rPr lang="en-US" sz="2200" dirty="0">
+              <a:t>])</a:t>
+            </a:r>
+            <a:endParaRPr lang="en-US" sz="1800" dirty="0"/>
+          </a:p>
+          <a:p>
+            <a:pPr algn="l" indent="0" marL="0">
+              <a:lnSpc>
+                <a:spcPts val="2340"/>
+              </a:lnSpc>
+              <a:buNone/>
+            </a:pPr>
+            <a:r>
+              <a:rPr lang="en-US" sz="1800" dirty="0">
                 <a:solidFill>
                   <a:srgbClr val="FFFFFF"/>
                 </a:solidFill>
@@ -5374,39 +5482,33 @@
                 <a:ea typeface="Courier New" pitchFamily="34" charset="-122"/>
                 <a:cs typeface="Courier New" pitchFamily="34" charset="-120"/>
               </a:rPr>
-              <a:t>]</a:t>
-            </a:r>
-            <a:endParaRPr lang="en-US" sz="2200" dirty="0"/>
-          </a:p>
-          <a:p>
-            <a:pPr algn="l" indent="0" marL="0">
-              <a:lnSpc>
-                <a:spcPts val="2860"/>
-              </a:lnSpc>
-              <a:buNone/>
-            </a:pPr>
-            <a:r>
-              <a:rPr lang="en-US" sz="2200" dirty="0">
-                <a:solidFill>
-                  <a:srgbClr val="FFFFFF"/>
+              <a:t>pred = model.predict(pd.DataFrame({</a:t>
+            </a:r>
+            <a:pPr algn="l" indent="0" marL="0">
+              <a:lnSpc>
+                <a:spcPts val="2340"/>
+              </a:lnSpc>
+              <a:buNone/>
+            </a:pPr>
+            <a:r>
+              <a:rPr lang="en-US" sz="1800" dirty="0">
+                <a:solidFill>
+                  <a:srgbClr val="E0BE36"/>
                 </a:solidFill>
                 <a:latin typeface="Courier New" pitchFamily="34" charset="0"/>
                 <a:ea typeface="Courier New" pitchFamily="34" charset="-122"/>
                 <a:cs typeface="Courier New" pitchFamily="34" charset="-120"/>
               </a:rPr>
-              <a:t>)</a:t>
-            </a:r>
-            <a:endParaRPr lang="en-US" sz="2200" dirty="0"/>
-          </a:p>
-          <a:p>
-            <a:pPr algn="l" indent="0" marL="0">
-              <a:lnSpc>
-                <a:spcPts val="2860"/>
-              </a:lnSpc>
-              <a:buNone/>
-            </a:pPr>
-            <a:r>
-              <a:rPr lang="en-US" sz="2200" dirty="0">
+              <a:t>"area_m2"</a:t>
+            </a:r>
+            <a:pPr algn="l" indent="0" marL="0">
+              <a:lnSpc>
+                <a:spcPts val="2340"/>
+              </a:lnSpc>
+              <a:buNone/>
+            </a:pPr>
+            <a:r>
+              <a:rPr lang="en-US" sz="1800" dirty="0">
                 <a:solidFill>
                   <a:srgbClr val="FFFFFF"/>
                 </a:solidFill>
@@ -5414,53 +5516,53 @@
                 <a:ea typeface="Courier New" pitchFamily="34" charset="-122"/>
                 <a:cs typeface="Courier New" pitchFamily="34" charset="-120"/>
               </a:rPr>
-              <a:t>pred = model.predict(pd.DataFrame({</a:t>
-            </a:r>
-            <a:pPr algn="l" indent="0" marL="0">
-              <a:lnSpc>
-                <a:spcPts val="2860"/>
-              </a:lnSpc>
-              <a:buNone/>
-            </a:pPr>
-            <a:r>
-              <a:rPr lang="en-US" sz="2200" dirty="0">
-                <a:solidFill>
-                  <a:srgbClr val="E0BE36"/>
+              <a:t>: [50]}))[0]</a:t>
+            </a:r>
+            <a:endParaRPr lang="en-US" sz="1800" dirty="0"/>
+          </a:p>
+          <a:p>
+            <a:pPr algn="l" indent="0" marL="0">
+              <a:lnSpc>
+                <a:spcPts val="2340"/>
+              </a:lnSpc>
+              <a:buNone/>
+            </a:pPr>
+            <a:r>
+              <a:rPr lang="en-US" sz="1800" dirty="0">
+                <a:solidFill>
+                  <a:srgbClr val="FFFFFF"/>
                 </a:solidFill>
                 <a:latin typeface="Courier New" pitchFamily="34" charset="0"/>
                 <a:ea typeface="Courier New" pitchFamily="34" charset="-122"/>
                 <a:cs typeface="Courier New" pitchFamily="34" charset="-120"/>
               </a:rPr>
-              <a:t>"area_m2"</a:t>
-            </a:r>
-            <a:pPr algn="l" indent="0" marL="0">
-              <a:lnSpc>
-                <a:spcPts val="2860"/>
-              </a:lnSpc>
-              <a:buNone/>
-            </a:pPr>
-            <a:r>
-              <a:rPr lang="en-US" sz="2200" dirty="0">
-                <a:solidFill>
-                  <a:srgbClr val="FFFFFF"/>
+              <a:t>print(</a:t>
+            </a:r>
+            <a:pPr algn="l" indent="0" marL="0">
+              <a:lnSpc>
+                <a:spcPts val="2340"/>
+              </a:lnSpc>
+              <a:buNone/>
+            </a:pPr>
+            <a:r>
+              <a:rPr lang="en-US" sz="1800" dirty="0">
+                <a:solidFill>
+                  <a:srgbClr val="E0BE36"/>
                 </a:solidFill>
                 <a:latin typeface="Courier New" pitchFamily="34" charset="0"/>
                 <a:ea typeface="Courier New" pitchFamily="34" charset="-122"/>
                 <a:cs typeface="Courier New" pitchFamily="34" charset="-120"/>
               </a:rPr>
-              <a:t>: [50]}))[0]</a:t>
-            </a:r>
-            <a:endParaRPr lang="en-US" sz="2200" dirty="0"/>
-          </a:p>
-          <a:p>
-            <a:pPr algn="l" indent="0" marL="0">
-              <a:lnSpc>
-                <a:spcPts val="2860"/>
-              </a:lnSpc>
-              <a:buNone/>
-            </a:pPr>
-            <a:r>
-              <a:rPr lang="en-US" sz="2200" dirty="0">
+              <a:t>"Estimated rent for 50 square metres:"</a:t>
+            </a:r>
+            <a:pPr algn="l" indent="0" marL="0">
+              <a:lnSpc>
+                <a:spcPts val="2340"/>
+              </a:lnSpc>
+              <a:buNone/>
+            </a:pPr>
+            <a:r>
+              <a:rPr lang="en-US" sz="1800" dirty="0">
                 <a:solidFill>
                   <a:srgbClr val="FFFFFF"/>
                 </a:solidFill>
@@ -5468,43 +5570,9 @@
                 <a:ea typeface="Courier New" pitchFamily="34" charset="-122"/>
                 <a:cs typeface="Courier New" pitchFamily="34" charset="-120"/>
               </a:rPr>
-              <a:t>print(</a:t>
-            </a:r>
-            <a:pPr algn="l" indent="0" marL="0">
-              <a:lnSpc>
-                <a:spcPts val="2860"/>
-              </a:lnSpc>
-              <a:buNone/>
-            </a:pPr>
-            <a:r>
-              <a:rPr lang="en-US" sz="2200" dirty="0">
-                <a:solidFill>
-                  <a:srgbClr val="E0BE36"/>
-                </a:solidFill>
-                <a:latin typeface="Courier New" pitchFamily="34" charset="0"/>
-                <a:ea typeface="Courier New" pitchFamily="34" charset="-122"/>
-                <a:cs typeface="Courier New" pitchFamily="34" charset="-120"/>
-              </a:rPr>
-              <a:t>"Estimated rent for 50 square metres:"</a:t>
-            </a:r>
-            <a:pPr algn="l" indent="0" marL="0">
-              <a:lnSpc>
-                <a:spcPts val="2860"/>
-              </a:lnSpc>
-              <a:buNone/>
-            </a:pPr>
-            <a:r>
-              <a:rPr lang="en-US" sz="2200" dirty="0">
-                <a:solidFill>
-                  <a:srgbClr val="FFFFFF"/>
-                </a:solidFill>
-                <a:latin typeface="Courier New" pitchFamily="34" charset="0"/>
-                <a:ea typeface="Courier New" pitchFamily="34" charset="-122"/>
-                <a:cs typeface="Courier New" pitchFamily="34" charset="-120"/>
-              </a:rPr>
               <a:t>, round(pred))</a:t>
             </a:r>
-            <a:endParaRPr lang="en-US" sz="2200" dirty="0"/>
+            <a:endParaRPr lang="en-US" sz="1800" dirty="0"/>
           </a:p>
         </p:txBody>
       </p:sp>
@@ -5516,8 +5584,8 @@
         </p:nvSpPr>
         <p:spPr>
           <a:xfrm>
-            <a:off x="640080" y="5173472"/>
-            <a:ext cx="8046720" cy="1090168"/>
+            <a:off x="640080" y="4050792"/>
+            <a:ext cx="8046720" cy="2212848"/>
           </a:xfrm>
           <a:prstGeom prst="rect">
             <a:avLst/>
@@ -5531,7 +5599,7 @@
           <a:p>
             <a:pPr algn="l" indent="0" marL="0">
               <a:lnSpc>
-                <a:spcPts val="2400"/>
+                <a:spcPts val="3120"/>
               </a:lnSpc>
               <a:spcAft>
                 <a:spcPts val="1010"/>
@@ -5539,7 +5607,7 @@
               <a:buNone/>
             </a:pPr>
             <a:r>
-              <a:rPr lang="en-US" sz="2000" dirty="0">
+              <a:rPr lang="en-US" sz="2600" dirty="0">
                 <a:solidFill>
                   <a:srgbClr val="111111"/>
                 </a:solidFill>
@@ -5549,12 +5617,12 @@
               </a:rPr>
               <a:t>Before you run it, write the monthly rent in UGX you expect for a home of 50 square metres.</a:t>
             </a:r>
-            <a:endParaRPr lang="en-US" sz="2000" dirty="0"/>
-          </a:p>
-          <a:p>
-            <a:pPr algn="l" indent="0" marL="0">
-              <a:lnSpc>
-                <a:spcPts val="2400"/>
+            <a:endParaRPr lang="en-US" sz="2600" dirty="0"/>
+          </a:p>
+          <a:p>
+            <a:pPr algn="l" indent="0" marL="0">
+              <a:lnSpc>
+                <a:spcPts val="3120"/>
               </a:lnSpc>
               <a:spcAft>
                 <a:spcPts val="1010"/>
@@ -5562,7 +5630,7 @@
               <a:buNone/>
             </a:pPr>
             <a:r>
-              <a:rPr lang="en-US" sz="2000" dirty="0">
+              <a:rPr lang="en-US" sz="2600" dirty="0">
                 <a:solidFill>
                   <a:srgbClr val="111111"/>
                 </a:solidFill>
@@ -5572,7 +5640,7 @@
               </a:rPr>
               <a:t>Write your guess on paper before we run it.</a:t>
             </a:r>
-            <a:endParaRPr lang="en-US" sz="2000" dirty="0"/>
+            <a:endParaRPr lang="en-US" sz="2600" dirty="0"/>
           </a:p>
         </p:txBody>
       </p:sp>
@@ -5592,7 +5660,7 @@
         </p:blipFill>
         <p:spPr>
           <a:xfrm>
-            <a:off x="10241280" y="5175758"/>
+            <a:off x="10241280" y="5031486"/>
             <a:ext cx="1188720" cy="1046988"/>
           </a:xfrm>
           <a:prstGeom prst="rect">
@@ -6707,7 +6775,7 @@
                 <a:ea typeface="Lato" pitchFamily="34" charset="-122"/>
                 <a:cs typeface="Lato" pitchFamily="34" charset="-120"/>
               </a:rPr>
-              <a:t>Make: your own version</a:t>
+              <a:t>Make: your own version (1 of 2)</a:t>
             </a:r>
             <a:endParaRPr lang="en-US" sz="3800" dirty="0"/>
           </a:p>
@@ -6736,15 +6804,15 @@
           <a:p>
             <a:pPr algn="l" indent="0" marL="0">
               <a:lnSpc>
-                <a:spcPts val="3240"/>
+                <a:spcPts val="3360"/>
               </a:lnSpc>
               <a:spcAft>
-                <a:spcPts val="2520"/>
+                <a:spcPts val="2020"/>
               </a:spcAft>
               <a:buNone/>
             </a:pPr>
             <a:r>
-              <a:rPr lang="en-US" sz="2700" dirty="0">
+              <a:rPr lang="en-US" sz="2800" dirty="0">
                 <a:solidFill>
                   <a:srgbClr val="111111"/>
                 </a:solidFill>
@@ -6752,22 +6820,22 @@
                 <a:ea typeface="Lato" pitchFamily="34" charset="-122"/>
                 <a:cs typeface="Lato" pitchFamily="34" charset="-120"/>
               </a:rPr>
-              <a:t>In a new code cell print your nickname and the result of 7 + 4. In another cell estimate the rent for 80 square metres. Save as ML01.ipynb, close it and reopen it. With the instructor, read AI_USE_POLICY.md: in weeks 1 to 6 all core work is your own, with no AI-generated solutions.</a:t>
-            </a:r>
-            <a:endParaRPr lang="en-US" sz="2700" dirty="0"/>
-          </a:p>
-          <a:p>
-            <a:pPr algn="l" indent="0" marL="0">
-              <a:lnSpc>
-                <a:spcPts val="3240"/>
+              <a:t>In a new code cell print your nickname and the result of 7 + 4.</a:t>
+            </a:r>
+            <a:endParaRPr lang="en-US" sz="2800" dirty="0"/>
+          </a:p>
+          <a:p>
+            <a:pPr algn="l" indent="0" marL="0">
+              <a:lnSpc>
+                <a:spcPts val="3360"/>
               </a:lnSpc>
               <a:spcAft>
-                <a:spcPts val="2520"/>
+                <a:spcPts val="2020"/>
               </a:spcAft>
               <a:buNone/>
             </a:pPr>
             <a:r>
-              <a:rPr lang="en-US" sz="2700" dirty="0">
+              <a:rPr lang="en-US" sz="2800" dirty="0">
                 <a:solidFill>
                   <a:srgbClr val="111111"/>
                 </a:solidFill>
@@ -6775,9 +6843,32 @@
                 <a:ea typeface="Lato" pitchFamily="34" charset="-122"/>
                 <a:cs typeface="Lato" pitchFamily="34" charset="-120"/>
               </a:rPr>
-              <a:t>Save it as ML01. Write two sentences: what you changed and how you checked it.</a:t>
-            </a:r>
-            <a:endParaRPr lang="en-US" sz="2700" dirty="0"/>
+              <a:t>In another cell estimate the rent for 80 square metres.</a:t>
+            </a:r>
+            <a:endParaRPr lang="en-US" sz="2800" dirty="0"/>
+          </a:p>
+          <a:p>
+            <a:pPr algn="l" indent="0" marL="0">
+              <a:lnSpc>
+                <a:spcPts val="3360"/>
+              </a:lnSpc>
+              <a:spcAft>
+                <a:spcPts val="2020"/>
+              </a:spcAft>
+              <a:buNone/>
+            </a:pPr>
+            <a:r>
+              <a:rPr lang="en-US" sz="2800" dirty="0">
+                <a:solidFill>
+                  <a:srgbClr val="111111"/>
+                </a:solidFill>
+                <a:latin typeface="Lato" pitchFamily="34" charset="0"/>
+                <a:ea typeface="Lato" pitchFamily="34" charset="-122"/>
+                <a:cs typeface="Lato" pitchFamily="34" charset="-120"/>
+              </a:rPr>
+              <a:t>Save as ML01.ipynb, close it and reopen it.</a:t>
+            </a:r>
+            <a:endParaRPr lang="en-US" sz="2800" dirty="0"/>
           </a:p>
         </p:txBody>
       </p:sp>
@@ -6913,15 +7004,83 @@
                 <a:ea typeface="Lato" pitchFamily="34" charset="-122"/>
                 <a:cs typeface="Lato" pitchFamily="34" charset="-120"/>
               </a:rPr>
-              <a:t>Two errors you may meet today</a:t>
+              <a:t>Make: your own version (2 of 2)</a:t>
             </a:r>
             <a:endParaRPr lang="en-US" sz="3800" dirty="0"/>
+          </a:p>
+        </p:txBody>
+      </p:sp>
+      <p:sp>
+        <p:nvSpPr>
+          <p:cNvPr id="3" name="Text 1"/>
+          <p:cNvSpPr txBox="1"/>
+          <p:nvPr/>
+        </p:nvSpPr>
+        <p:spPr>
+          <a:xfrm>
+            <a:off x="640080" y="1737360"/>
+            <a:ext cx="6949440" cy="4480560"/>
+          </a:xfrm>
+          <a:prstGeom prst="rect">
+            <a:avLst/>
+          </a:prstGeom>
+          <a:noFill/>
+          <a:ln/>
+        </p:spPr>
+        <p:txBody>
+          <a:bodyPr wrap="square" lIns="0" tIns="0" rIns="0" bIns="0" rtlCol="0" anchor="t"/>
+          <a:lstStyle/>
+          <a:p>
+            <a:pPr algn="l" indent="0" marL="0">
+              <a:lnSpc>
+                <a:spcPts val="3360"/>
+              </a:lnSpc>
+              <a:spcAft>
+                <a:spcPts val="2020"/>
+              </a:spcAft>
+              <a:buNone/>
+            </a:pPr>
+            <a:r>
+              <a:rPr lang="en-US" sz="2800" dirty="0">
+                <a:solidFill>
+                  <a:srgbClr val="111111"/>
+                </a:solidFill>
+                <a:latin typeface="Lato" pitchFamily="34" charset="0"/>
+                <a:ea typeface="Lato" pitchFamily="34" charset="-122"/>
+                <a:cs typeface="Lato" pitchFamily="34" charset="-120"/>
+              </a:rPr>
+              <a:t>With the instructor, read AI_USE_POLICY.md: in weeks 1 to 6 all core work is your own, with no AI-generated solutions.</a:t>
+            </a:r>
+            <a:endParaRPr lang="en-US" sz="2800" dirty="0"/>
+          </a:p>
+          <a:p>
+            <a:pPr algn="l" indent="0" marL="0">
+              <a:lnSpc>
+                <a:spcPts val="3360"/>
+              </a:lnSpc>
+              <a:spcAft>
+                <a:spcPts val="2020"/>
+              </a:spcAft>
+              <a:buNone/>
+            </a:pPr>
+            <a:r>
+              <a:rPr lang="en-US" sz="2800" dirty="0">
+                <a:solidFill>
+                  <a:srgbClr val="111111"/>
+                </a:solidFill>
+                <a:latin typeface="Lato" pitchFamily="34" charset="0"/>
+                <a:ea typeface="Lato" pitchFamily="34" charset="-122"/>
+                <a:cs typeface="Lato" pitchFamily="34" charset="-120"/>
+              </a:rPr>
+              <a:t>Write two sentences: what you changed and how you checked it.</a:t>
+            </a:r>
+            <a:endParaRPr lang="en-US" sz="2800" dirty="0"/>
           </a:p>
         </p:txBody>
       </p:sp>
       <p:pic>
         <p:nvPicPr>
-          <p:cNvPr id="3" name="Image 0" descr="Error">    </p:cNvPr>
+          <p:cNvPr id="4" name="Image 0" descr="A notebook saved with a tick">    </p:cNvPr>
           <p:cNvPicPr>
             <a:picLocks noChangeAspect="1"/>
           </p:cNvPicPr>
@@ -6935,335 +7094,14 @@
         </p:blipFill>
         <p:spPr>
           <a:xfrm>
-            <a:off x="640080" y="1691640"/>
-            <a:ext cx="822960" cy="822960"/>
+            <a:off x="8138160" y="1920240"/>
+            <a:ext cx="3474720" cy="3291840"/>
           </a:xfrm>
           <a:prstGeom prst="rect">
             <a:avLst/>
           </a:prstGeom>
         </p:spPr>
       </p:pic>
-      <p:sp>
-        <p:nvSpPr>
-          <p:cNvPr id="4" name="Shape 1"/>
-          <p:cNvSpPr/>
-          <p:nvPr/>
-        </p:nvSpPr>
-        <p:spPr>
-          <a:xfrm>
-            <a:off x="1645920" y="1828800"/>
-            <a:ext cx="4023360" cy="1645920"/>
-          </a:xfrm>
-          <a:prstGeom prst="roundRect">
-            <a:avLst>
-              <a:gd name="adj" fmla="val 3333"/>
-            </a:avLst>
-          </a:prstGeom>
-          <a:solidFill>
-            <a:srgbClr val="FFFFFF"/>
-          </a:solidFill>
-          <a:ln w="25400">
-            <a:solidFill>
-              <a:srgbClr val="AE2525"/>
-            </a:solidFill>
-            <a:prstDash val="solid"/>
-          </a:ln>
-        </p:spPr>
-      </p:sp>
-      <p:sp>
-        <p:nvSpPr>
-          <p:cNvPr id="5" name="Text 2"/>
-          <p:cNvSpPr txBox="1"/>
-          <p:nvPr/>
-        </p:nvSpPr>
-        <p:spPr>
-          <a:xfrm>
-            <a:off x="1783080" y="1920240"/>
-            <a:ext cx="3749040" cy="1463040"/>
-          </a:xfrm>
-          <a:prstGeom prst="rect">
-            <a:avLst/>
-          </a:prstGeom>
-          <a:noFill/>
-          <a:ln/>
-        </p:spPr>
-        <p:txBody>
-          <a:bodyPr wrap="square" lIns="0" tIns="0" rIns="0" bIns="0" rtlCol="0" anchor="ctr"/>
-          <a:lstStyle/>
-          <a:p>
-            <a:pPr algn="l" indent="0" marL="0">
-              <a:lnSpc>
-                <a:spcPts val="2500"/>
-              </a:lnSpc>
-              <a:buNone/>
-            </a:pPr>
-            <a:r>
-              <a:rPr lang="en-US" sz="2000" dirty="0">
-                <a:solidFill>
-                  <a:srgbClr val="AE2525"/>
-                </a:solidFill>
-                <a:latin typeface="Courier New" pitchFamily="34" charset="0"/>
-                <a:ea typeface="Courier New" pitchFamily="34" charset="-122"/>
-                <a:cs typeface="Courier New" pitchFamily="34" charset="-120"/>
-              </a:rPr>
-              <a:t>SyntaxError or invalid character</a:t>
-            </a:r>
-            <a:endParaRPr lang="en-US" sz="2000" dirty="0"/>
-          </a:p>
-        </p:txBody>
-      </p:sp>
-      <p:sp>
-        <p:nvSpPr>
-          <p:cNvPr id="6" name="Text 3"/>
-          <p:cNvSpPr txBox="1"/>
-          <p:nvPr/>
-        </p:nvSpPr>
-        <p:spPr>
-          <a:xfrm>
-            <a:off x="6035040" y="1664208"/>
-            <a:ext cx="5486400" cy="1965960"/>
-          </a:xfrm>
-          <a:prstGeom prst="rect">
-            <a:avLst/>
-          </a:prstGeom>
-          <a:noFill/>
-          <a:ln/>
-        </p:spPr>
-        <p:txBody>
-          <a:bodyPr wrap="square" lIns="0" tIns="0" rIns="0" bIns="0" rtlCol="0" anchor="t"/>
-          <a:lstStyle/>
-          <a:p>
-            <a:pPr algn="l" indent="0" marL="0">
-              <a:lnSpc>
-                <a:spcPts val="2640"/>
-              </a:lnSpc>
-              <a:spcAft>
-                <a:spcPts val="1300"/>
-              </a:spcAft>
-              <a:buNone/>
-            </a:pPr>
-            <a:r>
-              <a:rPr lang="en-US" sz="2200" dirty="0">
-                <a:solidFill>
-                  <a:srgbClr val="111111"/>
-                </a:solidFill>
-                <a:latin typeface="Lato" pitchFamily="34" charset="0"/>
-                <a:ea typeface="Lato" pitchFamily="34" charset="-122"/>
-                <a:cs typeface="Lato" pitchFamily="34" charset="-120"/>
-              </a:rPr>
-              <a:t>It means: A quotation mark is curly, usually from copying out of a document.</a:t>
-            </a:r>
-            <a:endParaRPr lang="en-US" sz="2200" dirty="0"/>
-          </a:p>
-          <a:p>
-            <a:pPr algn="l" indent="0" marL="0">
-              <a:lnSpc>
-                <a:spcPts val="2640"/>
-              </a:lnSpc>
-              <a:spcAft>
-                <a:spcPts val="1300"/>
-              </a:spcAft>
-              <a:buNone/>
-            </a:pPr>
-            <a:r>
-              <a:rPr lang="en-US" sz="2200" dirty="0">
-                <a:solidFill>
-                  <a:srgbClr val="111111"/>
-                </a:solidFill>
-                <a:latin typeface="Lato" pitchFamily="34" charset="0"/>
-                <a:ea typeface="Lato" pitchFamily="34" charset="-122"/>
-                <a:cs typeface="Lato" pitchFamily="34" charset="-120"/>
-              </a:rPr>
-              <a:t>Fix: Retype the quote marks with the keyboard so they are straight.</a:t>
-            </a:r>
-            <a:endParaRPr lang="en-US" sz="2200" dirty="0"/>
-          </a:p>
-        </p:txBody>
-      </p:sp>
-      <p:sp>
-        <p:nvSpPr>
-          <p:cNvPr id="7" name="Shape 4"/>
-          <p:cNvSpPr/>
-          <p:nvPr/>
-        </p:nvSpPr>
-        <p:spPr>
-          <a:xfrm>
-            <a:off x="640080" y="3813048"/>
-            <a:ext cx="10881360" cy="0"/>
-          </a:xfrm>
-          <a:prstGeom prst="line">
-            <a:avLst/>
-          </a:prstGeom>
-          <a:noFill/>
-          <a:ln w="12700">
-            <a:solidFill>
-              <a:srgbClr val="CFCFCF"/>
-            </a:solidFill>
-            <a:prstDash val="solid"/>
-          </a:ln>
-        </p:spPr>
-      </p:sp>
-      <p:pic>
-        <p:nvPicPr>
-          <p:cNvPr id="8" name="Image 1" descr="Error">    </p:cNvPr>
-          <p:cNvPicPr>
-            <a:picLocks noChangeAspect="1"/>
-          </p:cNvPicPr>
-          <p:nvPr/>
-        </p:nvPicPr>
-        <p:blipFill>
-          <a:blip r:embed="rId2"/>
-          <a:stretch>
-            <a:fillRect/>
-          </a:stretch>
-        </p:blipFill>
-        <p:spPr>
-          <a:xfrm>
-            <a:off x="640080" y="4023360"/>
-            <a:ext cx="822960" cy="822960"/>
-          </a:xfrm>
-          <a:prstGeom prst="rect">
-            <a:avLst/>
-          </a:prstGeom>
-        </p:spPr>
-      </p:pic>
-      <p:sp>
-        <p:nvSpPr>
-          <p:cNvPr id="9" name="Shape 5"/>
-          <p:cNvSpPr/>
-          <p:nvPr/>
-        </p:nvSpPr>
-        <p:spPr>
-          <a:xfrm>
-            <a:off x="1645920" y="4160520"/>
-            <a:ext cx="4023360" cy="1645920"/>
-          </a:xfrm>
-          <a:prstGeom prst="roundRect">
-            <a:avLst>
-              <a:gd name="adj" fmla="val 3333"/>
-            </a:avLst>
-          </a:prstGeom>
-          <a:solidFill>
-            <a:srgbClr val="FFFFFF"/>
-          </a:solidFill>
-          <a:ln w="25400">
-            <a:solidFill>
-              <a:srgbClr val="AE2525"/>
-            </a:solidFill>
-            <a:prstDash val="solid"/>
-          </a:ln>
-        </p:spPr>
-      </p:sp>
-      <p:sp>
-        <p:nvSpPr>
-          <p:cNvPr id="10" name="Text 6"/>
-          <p:cNvSpPr txBox="1"/>
-          <p:nvPr/>
-        </p:nvSpPr>
-        <p:spPr>
-          <a:xfrm>
-            <a:off x="1783080" y="4251960"/>
-            <a:ext cx="3749040" cy="1463040"/>
-          </a:xfrm>
-          <a:prstGeom prst="rect">
-            <a:avLst/>
-          </a:prstGeom>
-          <a:noFill/>
-          <a:ln/>
-        </p:spPr>
-        <p:txBody>
-          <a:bodyPr wrap="square" lIns="0" tIns="0" rIns="0" bIns="0" rtlCol="0" anchor="ctr"/>
-          <a:lstStyle/>
-          <a:p>
-            <a:pPr algn="l" indent="0" marL="0">
-              <a:lnSpc>
-                <a:spcPts val="2500"/>
-              </a:lnSpc>
-              <a:buNone/>
-            </a:pPr>
-            <a:r>
-              <a:rPr lang="en-US" sz="2000" dirty="0">
-                <a:solidFill>
-                  <a:srgbClr val="AE2525"/>
-                </a:solidFill>
-                <a:latin typeface="Courier New" pitchFamily="34" charset="0"/>
-                <a:ea typeface="Courier New" pitchFamily="34" charset="-122"/>
-                <a:cs typeface="Courier New" pitchFamily="34" charset="-120"/>
-              </a:rPr>
-              <a:t>ModuleNotFoundError: No module named 'sklearn'</a:t>
-            </a:r>
-            <a:endParaRPr lang="en-US" sz="2000" dirty="0"/>
-          </a:p>
-        </p:txBody>
-      </p:sp>
-      <p:sp>
-        <p:nvSpPr>
-          <p:cNvPr id="11" name="Text 7"/>
-          <p:cNvSpPr txBox="1"/>
-          <p:nvPr/>
-        </p:nvSpPr>
-        <p:spPr>
-          <a:xfrm>
-            <a:off x="6035040" y="3995928"/>
-            <a:ext cx="5486400" cy="1965960"/>
-          </a:xfrm>
-          <a:prstGeom prst="rect">
-            <a:avLst/>
-          </a:prstGeom>
-          <a:noFill/>
-          <a:ln/>
-        </p:spPr>
-        <p:txBody>
-          <a:bodyPr wrap="square" lIns="0" tIns="0" rIns="0" bIns="0" rtlCol="0" anchor="t"/>
-          <a:lstStyle/>
-          <a:p>
-            <a:pPr algn="l" indent="0" marL="0">
-              <a:lnSpc>
-                <a:spcPts val="2640"/>
-              </a:lnSpc>
-              <a:spcAft>
-                <a:spcPts val="1300"/>
-              </a:spcAft>
-              <a:buNone/>
-            </a:pPr>
-            <a:r>
-              <a:rPr lang="en-US" sz="2200" dirty="0">
-                <a:solidFill>
-                  <a:srgbClr val="111111"/>
-                </a:solidFill>
-                <a:latin typeface="Lato" pitchFamily="34" charset="0"/>
-                <a:ea typeface="Lato" pitchFamily="34" charset="-122"/>
-                <a:cs typeface="Lato" pitchFamily="34" charset="-120"/>
-              </a:rPr>
-              <a:t>It means: This laptop is not using the prepared camp environment.</a:t>
-            </a:r>
-            <a:endParaRPr lang="en-US" sz="2200" dirty="0"/>
-          </a:p>
-          <a:p>
-            <a:pPr algn="l" indent="0" marL="0">
-              <a:lnSpc>
-                <a:spcPts val="2640"/>
-              </a:lnSpc>
-              <a:spcAft>
-                <a:spcPts val="1300"/>
-              </a:spcAft>
-              <a:buNone/>
-            </a:pPr>
-            <a:r>
-              <a:rPr lang="en-US" sz="2200" dirty="0">
-                <a:solidFill>
-                  <a:srgbClr val="111111"/>
-                </a:solidFill>
-                <a:latin typeface="Lato" pitchFamily="34" charset="0"/>
-                <a:ea typeface="Lato" pitchFamily="34" charset="-122"/>
-                <a:cs typeface="Lato" pitchFamily="34" charset="-120"/>
-              </a:rPr>
-              <a:t>Fix: Tell the instructor. Do not install anything yourself.</a:t>
-            </a:r>
-            <a:endParaRPr lang="en-US" sz="2200" dirty="0"/>
-          </a:p>
-        </p:txBody>
-      </p:sp>
       <p:sp>
         <p:nvSpPr>
           <p:cNvPr id="25" name="Slide Number Placeholder 0"/>
@@ -7372,6 +7210,465 @@
                 <a:ea typeface="Lato" pitchFamily="34" charset="-122"/>
                 <a:cs typeface="Lato" pitchFamily="34" charset="-120"/>
               </a:rPr>
+              <a:t>Two errors you may meet today</a:t>
+            </a:r>
+            <a:endParaRPr lang="en-US" sz="3800" dirty="0"/>
+          </a:p>
+        </p:txBody>
+      </p:sp>
+      <p:pic>
+        <p:nvPicPr>
+          <p:cNvPr id="3" name="Image 0" descr="Error">    </p:cNvPr>
+          <p:cNvPicPr>
+            <a:picLocks noChangeAspect="1"/>
+          </p:cNvPicPr>
+          <p:nvPr/>
+        </p:nvPicPr>
+        <p:blipFill>
+          <a:blip r:embed="rId1"/>
+          <a:stretch>
+            <a:fillRect/>
+          </a:stretch>
+        </p:blipFill>
+        <p:spPr>
+          <a:xfrm>
+            <a:off x="640080" y="1691640"/>
+            <a:ext cx="822960" cy="822960"/>
+          </a:xfrm>
+          <a:prstGeom prst="rect">
+            <a:avLst/>
+          </a:prstGeom>
+        </p:spPr>
+      </p:pic>
+      <p:sp>
+        <p:nvSpPr>
+          <p:cNvPr id="4" name="Shape 1"/>
+          <p:cNvSpPr/>
+          <p:nvPr/>
+        </p:nvSpPr>
+        <p:spPr>
+          <a:xfrm>
+            <a:off x="1645920" y="1828800"/>
+            <a:ext cx="4023360" cy="1645920"/>
+          </a:xfrm>
+          <a:prstGeom prst="roundRect">
+            <a:avLst>
+              <a:gd name="adj" fmla="val 3333"/>
+            </a:avLst>
+          </a:prstGeom>
+          <a:solidFill>
+            <a:srgbClr val="FFFFFF"/>
+          </a:solidFill>
+          <a:ln w="25400">
+            <a:solidFill>
+              <a:srgbClr val="AE2525"/>
+            </a:solidFill>
+            <a:prstDash val="solid"/>
+          </a:ln>
+        </p:spPr>
+      </p:sp>
+      <p:sp>
+        <p:nvSpPr>
+          <p:cNvPr id="5" name="Text 2"/>
+          <p:cNvSpPr txBox="1"/>
+          <p:nvPr/>
+        </p:nvSpPr>
+        <p:spPr>
+          <a:xfrm>
+            <a:off x="1783080" y="1920240"/>
+            <a:ext cx="3749040" cy="1463040"/>
+          </a:xfrm>
+          <a:prstGeom prst="rect">
+            <a:avLst/>
+          </a:prstGeom>
+          <a:noFill/>
+          <a:ln/>
+        </p:spPr>
+        <p:txBody>
+          <a:bodyPr wrap="square" lIns="0" tIns="0" rIns="0" bIns="0" rtlCol="0" anchor="ctr"/>
+          <a:lstStyle/>
+          <a:p>
+            <a:pPr algn="l" indent="0" marL="0">
+              <a:lnSpc>
+                <a:spcPts val="2500"/>
+              </a:lnSpc>
+              <a:buNone/>
+            </a:pPr>
+            <a:r>
+              <a:rPr lang="en-US" sz="2000" dirty="0">
+                <a:solidFill>
+                  <a:srgbClr val="AE2525"/>
+                </a:solidFill>
+                <a:latin typeface="Courier New" pitchFamily="34" charset="0"/>
+                <a:ea typeface="Courier New" pitchFamily="34" charset="-122"/>
+                <a:cs typeface="Courier New" pitchFamily="34" charset="-120"/>
+              </a:rPr>
+              <a:t>SyntaxError or invalid character</a:t>
+            </a:r>
+            <a:endParaRPr lang="en-US" sz="2000" dirty="0"/>
+          </a:p>
+        </p:txBody>
+      </p:sp>
+      <p:sp>
+        <p:nvSpPr>
+          <p:cNvPr id="6" name="Text 3"/>
+          <p:cNvSpPr txBox="1"/>
+          <p:nvPr/>
+        </p:nvSpPr>
+        <p:spPr>
+          <a:xfrm>
+            <a:off x="6035040" y="1664208"/>
+            <a:ext cx="5486400" cy="1965960"/>
+          </a:xfrm>
+          <a:prstGeom prst="rect">
+            <a:avLst/>
+          </a:prstGeom>
+          <a:noFill/>
+          <a:ln/>
+        </p:spPr>
+        <p:txBody>
+          <a:bodyPr wrap="square" lIns="0" tIns="0" rIns="0" bIns="0" rtlCol="0" anchor="t"/>
+          <a:lstStyle/>
+          <a:p>
+            <a:pPr algn="l" indent="0" marL="0">
+              <a:lnSpc>
+                <a:spcPts val="2640"/>
+              </a:lnSpc>
+              <a:spcAft>
+                <a:spcPts val="1300"/>
+              </a:spcAft>
+              <a:buNone/>
+            </a:pPr>
+            <a:r>
+              <a:rPr lang="en-US" sz="2200" dirty="0">
+                <a:solidFill>
+                  <a:srgbClr val="111111"/>
+                </a:solidFill>
+                <a:latin typeface="Lato" pitchFamily="34" charset="0"/>
+                <a:ea typeface="Lato" pitchFamily="34" charset="-122"/>
+                <a:cs typeface="Lato" pitchFamily="34" charset="-120"/>
+              </a:rPr>
+              <a:t>It means: A quotation mark is curly, usually from copying out of a document.</a:t>
+            </a:r>
+            <a:endParaRPr lang="en-US" sz="2200" dirty="0"/>
+          </a:p>
+          <a:p>
+            <a:pPr algn="l" indent="0" marL="0">
+              <a:lnSpc>
+                <a:spcPts val="2640"/>
+              </a:lnSpc>
+              <a:spcAft>
+                <a:spcPts val="1300"/>
+              </a:spcAft>
+              <a:buNone/>
+            </a:pPr>
+            <a:r>
+              <a:rPr lang="en-US" sz="2200" dirty="0">
+                <a:solidFill>
+                  <a:srgbClr val="111111"/>
+                </a:solidFill>
+                <a:latin typeface="Lato" pitchFamily="34" charset="0"/>
+                <a:ea typeface="Lato" pitchFamily="34" charset="-122"/>
+                <a:cs typeface="Lato" pitchFamily="34" charset="-120"/>
+              </a:rPr>
+              <a:t>Fix: Retype the quote marks with the keyboard so they are straight.</a:t>
+            </a:r>
+            <a:endParaRPr lang="en-US" sz="2200" dirty="0"/>
+          </a:p>
+        </p:txBody>
+      </p:sp>
+      <p:sp>
+        <p:nvSpPr>
+          <p:cNvPr id="7" name="Shape 4"/>
+          <p:cNvSpPr/>
+          <p:nvPr/>
+        </p:nvSpPr>
+        <p:spPr>
+          <a:xfrm>
+            <a:off x="640080" y="3813048"/>
+            <a:ext cx="10881360" cy="0"/>
+          </a:xfrm>
+          <a:prstGeom prst="line">
+            <a:avLst/>
+          </a:prstGeom>
+          <a:noFill/>
+          <a:ln w="12700">
+            <a:solidFill>
+              <a:srgbClr val="CFCFCF"/>
+            </a:solidFill>
+            <a:prstDash val="solid"/>
+          </a:ln>
+        </p:spPr>
+      </p:sp>
+      <p:pic>
+        <p:nvPicPr>
+          <p:cNvPr id="8" name="Image 1" descr="Error">    </p:cNvPr>
+          <p:cNvPicPr>
+            <a:picLocks noChangeAspect="1"/>
+          </p:cNvPicPr>
+          <p:nvPr/>
+        </p:nvPicPr>
+        <p:blipFill>
+          <a:blip r:embed="rId2"/>
+          <a:stretch>
+            <a:fillRect/>
+          </a:stretch>
+        </p:blipFill>
+        <p:spPr>
+          <a:xfrm>
+            <a:off x="640080" y="4023360"/>
+            <a:ext cx="822960" cy="822960"/>
+          </a:xfrm>
+          <a:prstGeom prst="rect">
+            <a:avLst/>
+          </a:prstGeom>
+        </p:spPr>
+      </p:pic>
+      <p:sp>
+        <p:nvSpPr>
+          <p:cNvPr id="9" name="Shape 5"/>
+          <p:cNvSpPr/>
+          <p:nvPr/>
+        </p:nvSpPr>
+        <p:spPr>
+          <a:xfrm>
+            <a:off x="1645920" y="4160520"/>
+            <a:ext cx="4023360" cy="1645920"/>
+          </a:xfrm>
+          <a:prstGeom prst="roundRect">
+            <a:avLst>
+              <a:gd name="adj" fmla="val 3333"/>
+            </a:avLst>
+          </a:prstGeom>
+          <a:solidFill>
+            <a:srgbClr val="FFFFFF"/>
+          </a:solidFill>
+          <a:ln w="25400">
+            <a:solidFill>
+              <a:srgbClr val="AE2525"/>
+            </a:solidFill>
+            <a:prstDash val="solid"/>
+          </a:ln>
+        </p:spPr>
+      </p:sp>
+      <p:sp>
+        <p:nvSpPr>
+          <p:cNvPr id="10" name="Text 6"/>
+          <p:cNvSpPr txBox="1"/>
+          <p:nvPr/>
+        </p:nvSpPr>
+        <p:spPr>
+          <a:xfrm>
+            <a:off x="1783080" y="4251960"/>
+            <a:ext cx="3749040" cy="1463040"/>
+          </a:xfrm>
+          <a:prstGeom prst="rect">
+            <a:avLst/>
+          </a:prstGeom>
+          <a:noFill/>
+          <a:ln/>
+        </p:spPr>
+        <p:txBody>
+          <a:bodyPr wrap="square" lIns="0" tIns="0" rIns="0" bIns="0" rtlCol="0" anchor="ctr"/>
+          <a:lstStyle/>
+          <a:p>
+            <a:pPr algn="l" indent="0" marL="0">
+              <a:lnSpc>
+                <a:spcPts val="2500"/>
+              </a:lnSpc>
+              <a:buNone/>
+            </a:pPr>
+            <a:r>
+              <a:rPr lang="en-US" sz="2000" dirty="0">
+                <a:solidFill>
+                  <a:srgbClr val="AE2525"/>
+                </a:solidFill>
+                <a:latin typeface="Courier New" pitchFamily="34" charset="0"/>
+                <a:ea typeface="Courier New" pitchFamily="34" charset="-122"/>
+                <a:cs typeface="Courier New" pitchFamily="34" charset="-120"/>
+              </a:rPr>
+              <a:t>ModuleNotFoundError: No module named 'sklearn'</a:t>
+            </a:r>
+            <a:endParaRPr lang="en-US" sz="2000" dirty="0"/>
+          </a:p>
+        </p:txBody>
+      </p:sp>
+      <p:sp>
+        <p:nvSpPr>
+          <p:cNvPr id="11" name="Text 7"/>
+          <p:cNvSpPr txBox="1"/>
+          <p:nvPr/>
+        </p:nvSpPr>
+        <p:spPr>
+          <a:xfrm>
+            <a:off x="6035040" y="3995928"/>
+            <a:ext cx="5486400" cy="1965960"/>
+          </a:xfrm>
+          <a:prstGeom prst="rect">
+            <a:avLst/>
+          </a:prstGeom>
+          <a:noFill/>
+          <a:ln/>
+        </p:spPr>
+        <p:txBody>
+          <a:bodyPr wrap="square" lIns="0" tIns="0" rIns="0" bIns="0" rtlCol="0" anchor="t"/>
+          <a:lstStyle/>
+          <a:p>
+            <a:pPr algn="l" indent="0" marL="0">
+              <a:lnSpc>
+                <a:spcPts val="2640"/>
+              </a:lnSpc>
+              <a:spcAft>
+                <a:spcPts val="1300"/>
+              </a:spcAft>
+              <a:buNone/>
+            </a:pPr>
+            <a:r>
+              <a:rPr lang="en-US" sz="2200" dirty="0">
+                <a:solidFill>
+                  <a:srgbClr val="111111"/>
+                </a:solidFill>
+                <a:latin typeface="Lato" pitchFamily="34" charset="0"/>
+                <a:ea typeface="Lato" pitchFamily="34" charset="-122"/>
+                <a:cs typeface="Lato" pitchFamily="34" charset="-120"/>
+              </a:rPr>
+              <a:t>It means: This laptop is not using the prepared camp environment.</a:t>
+            </a:r>
+            <a:endParaRPr lang="en-US" sz="2200" dirty="0"/>
+          </a:p>
+          <a:p>
+            <a:pPr algn="l" indent="0" marL="0">
+              <a:lnSpc>
+                <a:spcPts val="2640"/>
+              </a:lnSpc>
+              <a:spcAft>
+                <a:spcPts val="1300"/>
+              </a:spcAft>
+              <a:buNone/>
+            </a:pPr>
+            <a:r>
+              <a:rPr lang="en-US" sz="2200" dirty="0">
+                <a:solidFill>
+                  <a:srgbClr val="111111"/>
+                </a:solidFill>
+                <a:latin typeface="Lato" pitchFamily="34" charset="0"/>
+                <a:ea typeface="Lato" pitchFamily="34" charset="-122"/>
+                <a:cs typeface="Lato" pitchFamily="34" charset="-120"/>
+              </a:rPr>
+              <a:t>Fix: Tell the instructor. Do not install anything yourself.</a:t>
+            </a:r>
+            <a:endParaRPr lang="en-US" sz="2200" dirty="0"/>
+          </a:p>
+        </p:txBody>
+      </p:sp>
+      <p:sp>
+        <p:nvSpPr>
+          <p:cNvPr id="25" name="Slide Number Placeholder 0"/>
+          <p:cNvSpPr>
+            <a:spLocks noGrp="1"/>
+          </p:cNvSpPr>
+          <p:nvPr>
+            <p:ph type="sldNum" sz="quarter" idx="4294967295"/>
+          </p:nvPr>
+        </p:nvSpPr>
+        <p:spPr>
+          <a:xfrm>
+            <a:off x="10607040" y="6400800"/>
+            <a:ext cx="941832" cy="274320"/>
+          </a:xfrm>
+          <a:prstGeom prst="rect">
+            <a:avLst/>
+          </a:prstGeom>
+          <a:extLst>
+            <a:ext uri="{C572A759-6A51-4108-AA02-DFA0A04FC94B}">
+              <ma14:wrappingTextBoxFlag xmlns:ma14="http://schemas.microsoft.com/office/mac/drawingml/2011/main" val="0"/>
+            </a:ext>
+          </a:extLst>
+        </p:spPr>
+        <p:txBody>
+          <a:bodyPr/>
+          <a:lstStyle>
+            <a:lvl1pPr>
+              <a:defRPr sz="1200">
+                <a:solidFill>
+                  <a:srgbClr val="666666"/>
+                </a:solidFill>
+                <a:latin typeface="Lato"/>
+                <a:ea typeface="Lato"/>
+                <a:cs typeface="Lato"/>
+              </a:defRPr>
+            </a:lvl1pPr>
+          </a:lstStyle>
+          <a:p>
+            <a:pPr algn="r"/>
+            <a:fld id="{F7021451-1387-4CA6-816F-3879F97B5CBC}" type="slidenum">
+              <a:rPr b="0" lang="en-US"/>
+              <a:t>23</a:t>
+            </a:fld>
+            <a:endParaRPr lang="en-US"/>
+          </a:p>
+        </p:txBody>
+      </p:sp>
+    </p:spTree>
+  </p:cSld>
+  <p:clrMapOvr>
+    <a:masterClrMapping/>
+  </p:clrMapOvr>
+</p:sld>
+</file>
+
+<file path=ppt/slides/slide24.xml><?xml version="1.0" encoding="utf-8"?>
+<p:sld xmlns:a="http://schemas.openxmlformats.org/drawingml/2006/main" xmlns:r="http://schemas.openxmlformats.org/officeDocument/2006/relationships" xmlns:p="http://schemas.openxmlformats.org/presentationml/2006/main">
+  <p:cSld name="Slide 24">
+    <p:spTree>
+      <p:nvGrpSpPr>
+        <p:cNvPr id="1" name=""/>
+        <p:cNvGrpSpPr/>
+        <p:nvPr/>
+      </p:nvGrpSpPr>
+      <p:grpSpPr>
+        <a:xfrm>
+          <a:off x="0" y="0"/>
+          <a:ext cx="0" cy="0"/>
+          <a:chOff x="0" y="0"/>
+          <a:chExt cx="0" cy="0"/>
+        </a:xfrm>
+      </p:grpSpPr>
+      <p:sp>
+        <p:nvSpPr>
+          <p:cNvPr id="2" name="Text 1"/>
+          <p:cNvSpPr/>
+          <p:nvPr>
+            <p:ph idx="102" type="title" hasCustomPrompt="1"/>
+          </p:nvPr>
+        </p:nvSpPr>
+        <p:spPr>
+          <a:xfrm>
+            <a:off x="640080" y="384048"/>
+            <a:ext cx="10881360" cy="1051560"/>
+          </a:xfrm>
+          <a:prstGeom prst="rect">
+            <a:avLst/>
+          </a:prstGeom>
+          <a:noFill/>
+          <a:ln/>
+        </p:spPr>
+        <p:txBody>
+          <a:bodyPr wrap="square" lIns="0" tIns="0" rIns="0" bIns="0" rtlCol="0" anchor="t"/>
+          <a:lstStyle/>
+          <a:p>
+            <a:pPr algn="l" indent="0" marL="0">
+              <a:buNone/>
+            </a:pPr>
+            <a:r>
+              <a:rPr lang="en-US" sz="3800" b="1" dirty="0">
+                <a:solidFill>
+                  <a:srgbClr val="111111"/>
+                </a:solidFill>
+                <a:latin typeface="Lato" pitchFamily="34" charset="0"/>
+                <a:ea typeface="Lato" pitchFamily="34" charset="-122"/>
+                <a:cs typeface="Lato" pitchFamily="34" charset="-120"/>
+              </a:rPr>
               <a:t>Finish this sentence in your notebook</a:t>
             </a:r>
             <a:endParaRPr lang="en-US" sz="3800" dirty="0"/>
@@ -7531,7 +7828,7 @@
             <a:pPr algn="r"/>
             <a:fld id="{F7021451-1387-4CA6-816F-3879F97B5CBC}" type="slidenum">
               <a:rPr b="0" lang="en-US"/>
-              <a:t>23</a:t>
+              <a:t>24</a:t>
             </a:fld>
             <a:endParaRPr lang="en-US"/>
           </a:p>
